--- a/media/resources/files/EkiOrunduuOnduktar_Boluu_KondumA.pptx
+++ b/media/resources/files/EkiOrunduuOnduktar_Boluu_KondumA.pptx
@@ -14728,7 +14728,7 @@
                 <a:ea typeface="+mn-ea"/>
                 <a:cs typeface="+mn-cs"/>
               </a:rPr>
-              <a:t>Турдуу пикирлер учун ыраазычылык билдиребиз.</a:t>
+              <a:t>Түрдүү пикирлер үчүн ыраазычылык билдиребиз.</a:t>
             </a:r>
           </a:p>
           <a:p>

--- a/media/resources/files/EkiOrunduuOnduktar_Boluu_KondumA.pptx
+++ b/media/resources/files/EkiOrunduuOnduktar_Boluu_KondumA.pptx
@@ -4659,7 +4659,7 @@
             </a:r>
             <a:r>
               <a:rPr lang="en-US" sz="1400" dirty="0"/>
-              <a:t>) 8 ÷ 0.2      			</a:t>
+              <a:t>) 8 ÷ 0,2      			</a:t>
             </a:r>
             <a:r>
               <a:rPr lang="ky-KG" sz="1400" dirty="0">
@@ -4673,7 +4673,7 @@
                 <a:ea typeface="+mn-lt"/>
                 <a:cs typeface="+mn-lt"/>
               </a:rPr>
-              <a:t>) 15 ÷ 0.3		     </a:t>
+              <a:t>) 15 ÷ 0,3		     </a:t>
             </a:r>
             <a:r>
               <a:rPr lang="ky-KG" sz="1400" dirty="0">
@@ -4687,7 +4687,7 @@
                 <a:ea typeface="+mn-lt"/>
                 <a:cs typeface="+mn-lt"/>
               </a:rPr>
-              <a:t>) 28 ÷ 0.4       </a:t>
+              <a:t>) 28 ÷ 0,4       </a:t>
             </a:r>
           </a:p>
           <a:p>
@@ -4708,7 +4708,7 @@
                 <a:ea typeface="+mn-lt"/>
                 <a:cs typeface="+mn-lt"/>
               </a:rPr>
-              <a:t>) 32 ÷ 0.2       			</a:t>
+              <a:t>) 32 ÷ 0,2       			</a:t>
             </a:r>
             <a:r>
               <a:rPr lang="ky-KG" sz="1400" dirty="0">
@@ -4722,7 +4722,7 @@
                 <a:ea typeface="+mn-lt"/>
                 <a:cs typeface="+mn-lt"/>
               </a:rPr>
-              <a:t>) 18 ÷ 0.3      		     </a:t>
+              <a:t>) 18 ÷ 0,3      		     </a:t>
             </a:r>
             <a:r>
               <a:rPr lang="ky-KG" sz="1400" dirty="0">
@@ -4736,7 +4736,7 @@
                 <a:ea typeface="+mn-lt"/>
                 <a:cs typeface="+mn-lt"/>
               </a:rPr>
-              <a:t>) 42 ÷ 0.6     </a:t>
+              <a:t>) 42 ÷ 0,6     </a:t>
             </a:r>
           </a:p>
           <a:p>
@@ -4757,7 +4757,7 @@
                 <a:ea typeface="+mn-lt"/>
                 <a:cs typeface="+mn-lt"/>
               </a:rPr>
-              <a:t>) 124 ÷ 0.2    			</a:t>
+              <a:t>) 124 ÷ 0,2    			</a:t>
             </a:r>
             <a:r>
               <a:rPr lang="ky-KG" sz="1400" dirty="0">
@@ -4771,7 +4771,7 @@
                 <a:ea typeface="+mn-lt"/>
                 <a:cs typeface="+mn-lt"/>
               </a:rPr>
-              <a:t>) 64 ÷ 0.4       		     </a:t>
+              <a:t>) 64 ÷ 0,4       		     </a:t>
             </a:r>
             <a:r>
               <a:rPr lang="ky-KG" sz="1400" dirty="0">
@@ -4785,7 +4785,7 @@
                 <a:ea typeface="+mn-lt"/>
                 <a:cs typeface="+mn-lt"/>
               </a:rPr>
-              <a:t>) 91 ÷ 0.7       </a:t>
+              <a:t>) 91 ÷ 0,7       </a:t>
             </a:r>
             <a:endParaRPr lang="en-US" sz="1400" dirty="0">
               <a:cs typeface="Calibri" panose="020F0502020204030204"/>
@@ -4820,7 +4820,7 @@
                 <a:ea typeface="+mn-lt"/>
                 <a:cs typeface="+mn-lt"/>
               </a:rPr>
-              <a:t>) 8.4 ÷ 2       			</a:t>
+              <a:t>) 8,4 ÷ 2       			</a:t>
             </a:r>
             <a:r>
               <a:rPr lang="ky-KG" sz="1400" dirty="0">
@@ -4834,7 +4834,7 @@
                 <a:ea typeface="+mn-lt"/>
                 <a:cs typeface="+mn-lt"/>
               </a:rPr>
-              <a:t>) 2.4 ÷ 3       		     </a:t>
+              <a:t>) 2,4 ÷ 3       		     </a:t>
             </a:r>
             <a:r>
               <a:rPr lang="ky-KG" sz="1400" dirty="0">
@@ -4848,7 +4848,7 @@
                 <a:ea typeface="+mn-lt"/>
                 <a:cs typeface="+mn-lt"/>
               </a:rPr>
-              <a:t>) 8.1 ÷ 3       </a:t>
+              <a:t>) 8,1 ÷ 3       </a:t>
             </a:r>
           </a:p>
           <a:p>
@@ -4869,7 +4869,7 @@
                 <a:ea typeface="+mn-lt"/>
                 <a:cs typeface="+mn-lt"/>
               </a:rPr>
-              <a:t>) 3.6 ÷ 6       			</a:t>
+              <a:t>) 3,6 ÷ 6       			</a:t>
             </a:r>
             <a:r>
               <a:rPr lang="ky-KG" sz="1400" dirty="0">
@@ -4883,7 +4883,7 @@
                 <a:ea typeface="+mn-lt"/>
                 <a:cs typeface="+mn-lt"/>
               </a:rPr>
-              <a:t>) 12.8 ÷ 4		    </a:t>
+              <a:t>) 12,8 ÷ 4		    </a:t>
             </a:r>
             <a:r>
               <a:rPr lang="ky-KG" sz="1400" dirty="0">
@@ -4897,7 +4897,7 @@
                 <a:ea typeface="+mn-lt"/>
                 <a:cs typeface="+mn-lt"/>
               </a:rPr>
-              <a:t>) 10.2 ÷ 6    </a:t>
+              <a:t>) 10,2 ÷ 6    </a:t>
             </a:r>
           </a:p>
           <a:p>
@@ -4918,7 +4918,7 @@
                 <a:ea typeface="+mn-lt"/>
                 <a:cs typeface="+mn-lt"/>
               </a:rPr>
-              <a:t>) 9.5 ÷ 5       			</a:t>
+              <a:t>) 9,5 ÷ 5       			</a:t>
             </a:r>
             <a:r>
               <a:rPr lang="ky-KG" sz="1400" dirty="0">
@@ -4932,7 +4932,7 @@
                 <a:ea typeface="+mn-lt"/>
                 <a:cs typeface="+mn-lt"/>
               </a:rPr>
-              <a:t>) 7.2 ÷ 4       		     </a:t>
+              <a:t>) 7,2 ÷ 4       		     </a:t>
             </a:r>
             <a:r>
               <a:rPr lang="ky-KG" sz="1400" dirty="0">
@@ -4946,7 +4946,7 @@
                 <a:ea typeface="+mn-lt"/>
                 <a:cs typeface="+mn-lt"/>
               </a:rPr>
-              <a:t>) 9.8 ÷ 7         </a:t>
+              <a:t>) 9,8 ÷ 7         </a:t>
             </a:r>
           </a:p>
           <a:p>
@@ -4978,7 +4978,7 @@
                 <a:ea typeface="+mn-lt"/>
                 <a:cs typeface="+mn-lt"/>
               </a:rPr>
-              <a:t>) 1.02 ÷ 0.6       			</a:t>
+              <a:t>) 1,02 ÷ 0,6       			</a:t>
             </a:r>
             <a:r>
               <a:rPr lang="ky-KG" sz="1400" dirty="0">
@@ -4992,7 +4992,7 @@
                 <a:ea typeface="+mn-lt"/>
                 <a:cs typeface="+mn-lt"/>
               </a:rPr>
-              <a:t>) 0.64 ÷ 0.04       </a:t>
+              <a:t>) 0,64 ÷ 0,04       </a:t>
             </a:r>
           </a:p>
           <a:p>
@@ -5013,7 +5013,7 @@
                 <a:ea typeface="+mn-lt"/>
                 <a:cs typeface="+mn-lt"/>
               </a:rPr>
-              <a:t>) 1.6 ÷ 0.05       			</a:t>
+              <a:t>) 1,6 ÷ 0,05       			</a:t>
             </a:r>
             <a:r>
               <a:rPr lang="ky-KG" sz="1400" dirty="0">
@@ -5027,7 +5027,7 @@
                 <a:ea typeface="+mn-lt"/>
                 <a:cs typeface="+mn-lt"/>
               </a:rPr>
-              <a:t>) 0.135 ÷ 0.5</a:t>
+              <a:t>) 0,135 ÷ 0,5</a:t>
             </a:r>
           </a:p>
           <a:p>
@@ -6788,7 +6788,7 @@
           <a:p>
             <a:r>
               <a:rPr lang="en-GB" sz="2000" dirty="0"/>
-              <a:t>4.2</a:t>
+              <a:t>4,2</a:t>
             </a:r>
           </a:p>
         </p:txBody>
@@ -6828,7 +6828,7 @@
           <a:p>
             <a:r>
               <a:rPr lang="en-GB" sz="2000" dirty="0"/>
-              <a:t>0.8</a:t>
+              <a:t>0,8</a:t>
             </a:r>
           </a:p>
         </p:txBody>
@@ -6868,7 +6868,7 @@
           <a:p>
             <a:r>
               <a:rPr lang="en-GB" sz="2000" dirty="0"/>
-              <a:t>2.7</a:t>
+              <a:t>2,7</a:t>
             </a:r>
           </a:p>
         </p:txBody>
@@ -7023,7 +7023,7 @@
             </a:r>
             <a:r>
               <a:rPr lang="en-US" sz="1200" dirty="0"/>
-              <a:t>) 8 ÷ 0.2      			</a:t>
+              <a:t>) 8 ÷ 0,2      			</a:t>
             </a:r>
             <a:r>
               <a:rPr lang="ky-KG" sz="1200" dirty="0">
@@ -7037,7 +7037,7 @@
                 <a:ea typeface="+mn-lt"/>
                 <a:cs typeface="+mn-lt"/>
               </a:rPr>
-              <a:t>) 15 ÷ 0.3		     </a:t>
+              <a:t>) 15 ÷ 0,3		     </a:t>
             </a:r>
             <a:r>
               <a:rPr lang="ky-KG" sz="1200" dirty="0">
@@ -7051,7 +7051,7 @@
                 <a:ea typeface="+mn-lt"/>
                 <a:cs typeface="+mn-lt"/>
               </a:rPr>
-              <a:t>) 28 ÷ 0.4       </a:t>
+              <a:t>) 28 ÷ 0,4       </a:t>
             </a:r>
           </a:p>
           <a:p>
@@ -7072,7 +7072,7 @@
                 <a:ea typeface="+mn-lt"/>
                 <a:cs typeface="+mn-lt"/>
               </a:rPr>
-              <a:t>) 32 ÷ 0.2       			</a:t>
+              <a:t>) 32 ÷ 0,2       			</a:t>
             </a:r>
             <a:r>
               <a:rPr lang="ky-KG" sz="1200" dirty="0">
@@ -7086,7 +7086,7 @@
                 <a:ea typeface="+mn-lt"/>
                 <a:cs typeface="+mn-lt"/>
               </a:rPr>
-              <a:t>) 18 ÷ 0.3      		     </a:t>
+              <a:t>) 18 ÷ 0,3      		     </a:t>
             </a:r>
             <a:r>
               <a:rPr lang="ky-KG" sz="1200" dirty="0">
@@ -7100,7 +7100,7 @@
                 <a:ea typeface="+mn-lt"/>
                 <a:cs typeface="+mn-lt"/>
               </a:rPr>
-              <a:t>) 42 ÷ 0.6     </a:t>
+              <a:t>) 42 ÷ 0,6     </a:t>
             </a:r>
           </a:p>
           <a:p>
@@ -7121,7 +7121,7 @@
                 <a:ea typeface="+mn-lt"/>
                 <a:cs typeface="+mn-lt"/>
               </a:rPr>
-              <a:t>) 124 ÷ 0.2    			</a:t>
+              <a:t>) 124 ÷ 0,2    			</a:t>
             </a:r>
             <a:r>
               <a:rPr lang="ky-KG" sz="1200" dirty="0">
@@ -7135,7 +7135,7 @@
                 <a:ea typeface="+mn-lt"/>
                 <a:cs typeface="+mn-lt"/>
               </a:rPr>
-              <a:t>) 64 ÷ 0.4       		     </a:t>
+              <a:t>) 64 ÷ 0,4       		     </a:t>
             </a:r>
             <a:r>
               <a:rPr lang="ky-KG" sz="1200" dirty="0">
@@ -7149,7 +7149,7 @@
                 <a:ea typeface="+mn-lt"/>
                 <a:cs typeface="+mn-lt"/>
               </a:rPr>
-              <a:t>) 91 ÷ 0.7       </a:t>
+              <a:t>) 91 ÷ 0,7       </a:t>
             </a:r>
             <a:endParaRPr lang="en-US" sz="1200" dirty="0">
               <a:cs typeface="Calibri" panose="020F0502020204030204"/>
@@ -7184,7 +7184,7 @@
                 <a:ea typeface="+mn-lt"/>
                 <a:cs typeface="+mn-lt"/>
               </a:rPr>
-              <a:t>) 8.4 ÷ 2       			</a:t>
+              <a:t>) 8,4 ÷ 2       			</a:t>
             </a:r>
             <a:r>
               <a:rPr lang="ky-KG" sz="1200" dirty="0">
@@ -7198,7 +7198,7 @@
                 <a:ea typeface="+mn-lt"/>
                 <a:cs typeface="+mn-lt"/>
               </a:rPr>
-              <a:t>) 2.4 ÷ 3       		     </a:t>
+              <a:t>) 2,4 ÷ 3       		     </a:t>
             </a:r>
             <a:r>
               <a:rPr lang="ky-KG" sz="1200" dirty="0">
@@ -7212,7 +7212,7 @@
                 <a:ea typeface="+mn-lt"/>
                 <a:cs typeface="+mn-lt"/>
               </a:rPr>
-              <a:t>) 8.1 ÷ 3       </a:t>
+              <a:t>) 8,1 ÷ 3       </a:t>
             </a:r>
           </a:p>
           <a:p>
@@ -7233,7 +7233,7 @@
                 <a:ea typeface="+mn-lt"/>
                 <a:cs typeface="+mn-lt"/>
               </a:rPr>
-              <a:t>) 3.6 ÷ 6       			</a:t>
+              <a:t>) 3,6 ÷ 6       			</a:t>
             </a:r>
             <a:r>
               <a:rPr lang="ky-KG" sz="1200" dirty="0">
@@ -7247,7 +7247,7 @@
                 <a:ea typeface="+mn-lt"/>
                 <a:cs typeface="+mn-lt"/>
               </a:rPr>
-              <a:t>) 12.8 ÷ 4		    </a:t>
+              <a:t>) 12,8 ÷ 4		    </a:t>
             </a:r>
             <a:r>
               <a:rPr lang="ky-KG" sz="1200" dirty="0">
@@ -7261,7 +7261,7 @@
                 <a:ea typeface="+mn-lt"/>
                 <a:cs typeface="+mn-lt"/>
               </a:rPr>
-              <a:t>) 10.2 ÷ 6    </a:t>
+              <a:t>) 10,2 ÷ 6    </a:t>
             </a:r>
           </a:p>
           <a:p>
@@ -7282,7 +7282,7 @@
                 <a:ea typeface="+mn-lt"/>
                 <a:cs typeface="+mn-lt"/>
               </a:rPr>
-              <a:t>) 9.5 ÷ 5       			</a:t>
+              <a:t>) 9,5 ÷ 5       			</a:t>
             </a:r>
             <a:r>
               <a:rPr lang="ky-KG" sz="1200" dirty="0">
@@ -7296,7 +7296,7 @@
                 <a:ea typeface="+mn-lt"/>
                 <a:cs typeface="+mn-lt"/>
               </a:rPr>
-              <a:t>) 7.2 ÷ 4       		     </a:t>
+              <a:t>) 7,2 ÷ 4       		     </a:t>
             </a:r>
             <a:r>
               <a:rPr lang="ky-KG" sz="1200" dirty="0">
@@ -7310,7 +7310,7 @@
                 <a:ea typeface="+mn-lt"/>
                 <a:cs typeface="+mn-lt"/>
               </a:rPr>
-              <a:t>) 9.8 ÷ 7         </a:t>
+              <a:t>) 9,8 ÷ 7         </a:t>
             </a:r>
           </a:p>
           <a:p>
@@ -7342,7 +7342,7 @@
                 <a:ea typeface="+mn-lt"/>
                 <a:cs typeface="+mn-lt"/>
               </a:rPr>
-              <a:t>) 1.02 ÷ 0.6       			</a:t>
+              <a:t>) 1,02 ÷ 0,6       			</a:t>
             </a:r>
             <a:r>
               <a:rPr lang="ky-KG" sz="1200" dirty="0">
@@ -7356,7 +7356,7 @@
                 <a:ea typeface="+mn-lt"/>
                 <a:cs typeface="+mn-lt"/>
               </a:rPr>
-              <a:t>) 0.64 ÷ 0.04       </a:t>
+              <a:t>) 0,64 ÷ 0,04       </a:t>
             </a:r>
           </a:p>
           <a:p>
@@ -7377,7 +7377,7 @@
                 <a:ea typeface="+mn-lt"/>
                 <a:cs typeface="+mn-lt"/>
               </a:rPr>
-              <a:t>) 1.6 ÷ 0.05       			</a:t>
+              <a:t>) 1,6 ÷ 0,05       			</a:t>
             </a:r>
             <a:r>
               <a:rPr lang="ky-KG" sz="1200" dirty="0">
@@ -7391,7 +7391,7 @@
                 <a:ea typeface="+mn-lt"/>
                 <a:cs typeface="+mn-lt"/>
               </a:rPr>
-              <a:t>) 0.135 ÷ 0.5</a:t>
+              <a:t>) 0,135 ÷ 0,5</a:t>
             </a:r>
           </a:p>
           <a:p>
@@ -9116,7 +9116,7 @@
           <a:p>
             <a:r>
               <a:rPr lang="en-GB" sz="2000" dirty="0"/>
-              <a:t>4.2</a:t>
+              <a:t>4,2</a:t>
             </a:r>
           </a:p>
         </p:txBody>
@@ -9156,7 +9156,7 @@
           <a:p>
             <a:r>
               <a:rPr lang="en-GB" sz="2000" dirty="0"/>
-              <a:t>0.6</a:t>
+              <a:t>0,6</a:t>
             </a:r>
           </a:p>
         </p:txBody>
@@ -9196,7 +9196,7 @@
           <a:p>
             <a:r>
               <a:rPr lang="en-GB" sz="2000" dirty="0"/>
-              <a:t>1.9</a:t>
+              <a:t>1,9</a:t>
             </a:r>
           </a:p>
         </p:txBody>
@@ -9236,7 +9236,7 @@
           <a:p>
             <a:r>
               <a:rPr lang="en-GB" sz="2000" dirty="0"/>
-              <a:t>0.8</a:t>
+              <a:t>0,8</a:t>
             </a:r>
           </a:p>
         </p:txBody>
@@ -9276,7 +9276,7 @@
           <a:p>
             <a:r>
               <a:rPr lang="en-GB" sz="2000" dirty="0"/>
-              <a:t>3.2</a:t>
+              <a:t>3,2</a:t>
             </a:r>
           </a:p>
         </p:txBody>
@@ -9316,7 +9316,7 @@
           <a:p>
             <a:r>
               <a:rPr lang="en-GB" sz="2000" dirty="0"/>
-              <a:t>1.8</a:t>
+              <a:t>1,8</a:t>
             </a:r>
           </a:p>
         </p:txBody>
@@ -9356,7 +9356,7 @@
           <a:p>
             <a:r>
               <a:rPr lang="en-GB" sz="2000" dirty="0"/>
-              <a:t>2.7</a:t>
+              <a:t>2,7</a:t>
             </a:r>
           </a:p>
         </p:txBody>
@@ -9398,7 +9398,7 @@
           <a:p>
             <a:r>
               <a:rPr lang="en-GB" sz="2000" dirty="0"/>
-              <a:t>1.7</a:t>
+              <a:t>1,7</a:t>
             </a:r>
           </a:p>
         </p:txBody>
@@ -9438,7 +9438,7 @@
           <a:p>
             <a:r>
               <a:rPr lang="en-GB" sz="2000" dirty="0"/>
-              <a:t>1.4</a:t>
+              <a:t>1,4</a:t>
             </a:r>
           </a:p>
         </p:txBody>
@@ -9478,7 +9478,7 @@
           <a:p>
             <a:r>
               <a:rPr lang="en-GB" sz="2000" dirty="0"/>
-              <a:t>1.7</a:t>
+              <a:t>1,7</a:t>
             </a:r>
           </a:p>
         </p:txBody>
@@ -9598,7 +9598,7 @@
           <a:p>
             <a:r>
               <a:rPr lang="en-GB" sz="2000" dirty="0"/>
-              <a:t>0.27</a:t>
+              <a:t>0,27</a:t>
             </a:r>
           </a:p>
         </p:txBody>
@@ -9682,7 +9682,7 @@
           <a:p>
             <a:r>
               <a:rPr lang="en-GB" sz="2000" dirty="0"/>
-              <a:t>1.52</a:t>
+              <a:t>1,52</a:t>
             </a:r>
           </a:p>
         </p:txBody>
@@ -9766,7 +9766,7 @@
           <a:p>
             <a:r>
               <a:rPr lang="en-GB" sz="2000" dirty="0"/>
-              <a:t>2.35 cm</a:t>
+              <a:t>2,35 cm</a:t>
             </a:r>
           </a:p>
         </p:txBody>
@@ -9808,7 +9808,7 @@
           <a:p>
             <a:r>
               <a:rPr lang="en-GB" sz="2000" dirty="0"/>
-              <a:t>3.25 cm</a:t>
+              <a:t>3,25 cm</a:t>
             </a:r>
           </a:p>
         </p:txBody>
@@ -9963,7 +9963,7 @@
             </a:r>
             <a:r>
               <a:rPr lang="en-US" sz="1200" dirty="0"/>
-              <a:t>) 8 ÷ 0.2      			</a:t>
+              <a:t>) 8 ÷ 0,2      			</a:t>
             </a:r>
             <a:r>
               <a:rPr lang="ky-KG" sz="1200" dirty="0">
@@ -9977,7 +9977,7 @@
                 <a:ea typeface="+mn-lt"/>
                 <a:cs typeface="+mn-lt"/>
               </a:rPr>
-              <a:t>) 15 ÷ 0.3		     </a:t>
+              <a:t>) 15 ÷ 0,3		     </a:t>
             </a:r>
             <a:r>
               <a:rPr lang="ky-KG" sz="1200" dirty="0">
@@ -9991,7 +9991,7 @@
                 <a:ea typeface="+mn-lt"/>
                 <a:cs typeface="+mn-lt"/>
               </a:rPr>
-              <a:t>) 28 ÷ 0.4       </a:t>
+              <a:t>) 28 ÷ 0,4       </a:t>
             </a:r>
           </a:p>
           <a:p>
@@ -10012,7 +10012,7 @@
                 <a:ea typeface="+mn-lt"/>
                 <a:cs typeface="+mn-lt"/>
               </a:rPr>
-              <a:t>) 32 ÷ 0.2       			</a:t>
+              <a:t>) 32 ÷ 0,2       			</a:t>
             </a:r>
             <a:r>
               <a:rPr lang="ky-KG" sz="1200" dirty="0">
@@ -10026,7 +10026,7 @@
                 <a:ea typeface="+mn-lt"/>
                 <a:cs typeface="+mn-lt"/>
               </a:rPr>
-              <a:t>) 18 ÷ 0.3      		     </a:t>
+              <a:t>) 18 ÷ 0,3      		     </a:t>
             </a:r>
             <a:r>
               <a:rPr lang="ky-KG" sz="1200" dirty="0">
@@ -10040,7 +10040,7 @@
                 <a:ea typeface="+mn-lt"/>
                 <a:cs typeface="+mn-lt"/>
               </a:rPr>
-              <a:t>) 42 ÷ 0.6     </a:t>
+              <a:t>) 42 ÷ 0,6     </a:t>
             </a:r>
           </a:p>
           <a:p>
@@ -10061,7 +10061,7 @@
                 <a:ea typeface="+mn-lt"/>
                 <a:cs typeface="+mn-lt"/>
               </a:rPr>
-              <a:t>) 124 ÷ 0.2    			</a:t>
+              <a:t>) 124 ÷ 0,2    			</a:t>
             </a:r>
             <a:r>
               <a:rPr lang="ky-KG" sz="1200" dirty="0">
@@ -10075,7 +10075,7 @@
                 <a:ea typeface="+mn-lt"/>
                 <a:cs typeface="+mn-lt"/>
               </a:rPr>
-              <a:t>) 64 ÷ 0.4       		     </a:t>
+              <a:t>) 64 ÷ 0,4       		     </a:t>
             </a:r>
             <a:r>
               <a:rPr lang="ky-KG" sz="1200" dirty="0">
@@ -10089,7 +10089,7 @@
                 <a:ea typeface="+mn-lt"/>
                 <a:cs typeface="+mn-lt"/>
               </a:rPr>
-              <a:t>) 91 ÷ 0.7       </a:t>
+              <a:t>) 91 ÷ 0,7       </a:t>
             </a:r>
             <a:endParaRPr lang="en-US" sz="1200" dirty="0">
               <a:cs typeface="Calibri" panose="020F0502020204030204"/>
@@ -10124,7 +10124,7 @@
                 <a:ea typeface="+mn-lt"/>
                 <a:cs typeface="+mn-lt"/>
               </a:rPr>
-              <a:t>) 8.4 ÷ 2       			</a:t>
+              <a:t>) 8,4 ÷ 2       			</a:t>
             </a:r>
             <a:r>
               <a:rPr lang="ky-KG" sz="1200" dirty="0">
@@ -10138,7 +10138,7 @@
                 <a:ea typeface="+mn-lt"/>
                 <a:cs typeface="+mn-lt"/>
               </a:rPr>
-              <a:t>) 2.4 ÷ 3       		     </a:t>
+              <a:t>) 2,4 ÷ 3       		     </a:t>
             </a:r>
             <a:r>
               <a:rPr lang="ky-KG" sz="1200" dirty="0">
@@ -10152,7 +10152,7 @@
                 <a:ea typeface="+mn-lt"/>
                 <a:cs typeface="+mn-lt"/>
               </a:rPr>
-              <a:t>) 8.1 ÷ 3       </a:t>
+              <a:t>) 8,1 ÷ 3       </a:t>
             </a:r>
           </a:p>
           <a:p>
@@ -10173,7 +10173,7 @@
                 <a:ea typeface="+mn-lt"/>
                 <a:cs typeface="+mn-lt"/>
               </a:rPr>
-              <a:t>) 3.6 ÷ 6       			</a:t>
+              <a:t>) 3,6 ÷ 6       			</a:t>
             </a:r>
             <a:r>
               <a:rPr lang="ky-KG" sz="1200" dirty="0">
@@ -10187,7 +10187,7 @@
                 <a:ea typeface="+mn-lt"/>
                 <a:cs typeface="+mn-lt"/>
               </a:rPr>
-              <a:t>) 12.8 ÷ 4		    </a:t>
+              <a:t>) 12,8 ÷ 4		    </a:t>
             </a:r>
             <a:r>
               <a:rPr lang="ky-KG" sz="1200" dirty="0">
@@ -10201,7 +10201,7 @@
                 <a:ea typeface="+mn-lt"/>
                 <a:cs typeface="+mn-lt"/>
               </a:rPr>
-              <a:t>) 10.2 ÷ 6    </a:t>
+              <a:t>) 10,2 ÷ 6    </a:t>
             </a:r>
           </a:p>
           <a:p>
@@ -10222,7 +10222,7 @@
                 <a:ea typeface="+mn-lt"/>
                 <a:cs typeface="+mn-lt"/>
               </a:rPr>
-              <a:t>) 9.5 ÷ 5       			</a:t>
+              <a:t>) 9,5 ÷ 5       			</a:t>
             </a:r>
             <a:r>
               <a:rPr lang="ky-KG" sz="1200" dirty="0">
@@ -10236,7 +10236,7 @@
                 <a:ea typeface="+mn-lt"/>
                 <a:cs typeface="+mn-lt"/>
               </a:rPr>
-              <a:t>) 7.2 ÷ 4       		     </a:t>
+              <a:t>) 7,2 ÷ 4       		     </a:t>
             </a:r>
             <a:r>
               <a:rPr lang="ky-KG" sz="1200" dirty="0">
@@ -10250,7 +10250,7 @@
                 <a:ea typeface="+mn-lt"/>
                 <a:cs typeface="+mn-lt"/>
               </a:rPr>
-              <a:t>) 9.8 ÷ 7         </a:t>
+              <a:t>) 9,8 ÷ 7         </a:t>
             </a:r>
           </a:p>
           <a:p>
@@ -10282,7 +10282,7 @@
                 <a:ea typeface="+mn-lt"/>
                 <a:cs typeface="+mn-lt"/>
               </a:rPr>
-              <a:t>) 1.02 ÷ 0.6       			</a:t>
+              <a:t>) 1,02 ÷ 0,6       			</a:t>
             </a:r>
             <a:r>
               <a:rPr lang="ky-KG" sz="1200" dirty="0">
@@ -10296,7 +10296,7 @@
                 <a:ea typeface="+mn-lt"/>
                 <a:cs typeface="+mn-lt"/>
               </a:rPr>
-              <a:t>) 0.64 ÷ 0.04       </a:t>
+              <a:t>) 0,64 ÷ 0,04       </a:t>
             </a:r>
           </a:p>
           <a:p>
@@ -10317,7 +10317,7 @@
                 <a:ea typeface="+mn-lt"/>
                 <a:cs typeface="+mn-lt"/>
               </a:rPr>
-              <a:t>) 1.6 ÷ 0.05       			</a:t>
+              <a:t>) 1,6 ÷ 0,05       			</a:t>
             </a:r>
             <a:r>
               <a:rPr lang="ky-KG" sz="1200" dirty="0">
@@ -10331,7 +10331,7 @@
                 <a:ea typeface="+mn-lt"/>
                 <a:cs typeface="+mn-lt"/>
               </a:rPr>
-              <a:t>) 0.135 ÷ 0.5</a:t>
+              <a:t>) 0,135 ÷ 0,5</a:t>
             </a:r>
           </a:p>
           <a:p>
@@ -11568,7 +11568,7 @@
           <a:p>
             <a:r>
               <a:rPr lang="en-GB" sz="2000" dirty="0"/>
-              <a:t>0.3</a:t>
+              <a:t>0,3</a:t>
             </a:r>
           </a:p>
         </p:txBody>
@@ -11815,7 +11815,7 @@
                 <a:ea typeface="+mn-ea"/>
                 <a:cs typeface="+mn-cs"/>
               </a:rPr>
-              <a:t>) 8 ÷ 0.2      			</a:t>
+              <a:t>) 8 ÷ 0,2      			</a:t>
             </a:r>
             <a:r>
               <a:rPr kumimoji="0" lang="ky-KG" sz="1200" b="0" i="0" u="none" strike="noStrike" kern="1200" cap="none" spc="0" normalizeH="0" baseline="0" noProof="0" dirty="0">
@@ -11849,7 +11849,7 @@
                 <a:ea typeface="Calibri" panose="020F0502020204030204"/>
                 <a:cs typeface="Calibri" panose="020F0502020204030204"/>
               </a:rPr>
-              <a:t>) 15 ÷ 0.3		     </a:t>
+              <a:t>) 15 ÷ 0,3		     </a:t>
             </a:r>
             <a:r>
               <a:rPr kumimoji="0" lang="ky-KG" sz="1200" b="0" i="0" u="none" strike="noStrike" kern="1200" cap="none" spc="0" normalizeH="0" baseline="0" noProof="0" dirty="0">
@@ -11883,7 +11883,7 @@
                 <a:ea typeface="Calibri" panose="020F0502020204030204"/>
                 <a:cs typeface="Calibri" panose="020F0502020204030204"/>
               </a:rPr>
-              <a:t>) 28 ÷ 0.4       </a:t>
+              <a:t>) 28 ÷ 0,4       </a:t>
             </a:r>
           </a:p>
           <a:p>
@@ -11936,7 +11936,7 @@
                 <a:ea typeface="Calibri" panose="020F0502020204030204"/>
                 <a:cs typeface="Calibri" panose="020F0502020204030204"/>
               </a:rPr>
-              <a:t>) 32 ÷ 0.2       			</a:t>
+              <a:t>) 32 ÷ 0,2       			</a:t>
             </a:r>
             <a:r>
               <a:rPr kumimoji="0" lang="ky-KG" sz="1200" b="0" i="0" u="none" strike="noStrike" kern="1200" cap="none" spc="0" normalizeH="0" baseline="0" noProof="0" dirty="0">
@@ -11970,7 +11970,7 @@
                 <a:ea typeface="Calibri" panose="020F0502020204030204"/>
                 <a:cs typeface="Calibri" panose="020F0502020204030204"/>
               </a:rPr>
-              <a:t>) 18 ÷ 0.3      		     </a:t>
+              <a:t>) 18 ÷ 0,3      		     </a:t>
             </a:r>
             <a:r>
               <a:rPr kumimoji="0" lang="ky-KG" sz="1200" b="0" i="0" u="none" strike="noStrike" kern="1200" cap="none" spc="0" normalizeH="0" baseline="0" noProof="0" dirty="0">
@@ -12004,7 +12004,7 @@
                 <a:ea typeface="Calibri" panose="020F0502020204030204"/>
                 <a:cs typeface="Calibri" panose="020F0502020204030204"/>
               </a:rPr>
-              <a:t>) 42 ÷ 0.6     </a:t>
+              <a:t>) 42 ÷ 0,6     </a:t>
             </a:r>
           </a:p>
           <a:p>
@@ -12057,7 +12057,7 @@
                 <a:ea typeface="Calibri" panose="020F0502020204030204"/>
                 <a:cs typeface="Calibri" panose="020F0502020204030204"/>
               </a:rPr>
-              <a:t>) 124 ÷ 0.2    			</a:t>
+              <a:t>) 124 ÷ 0,2    			</a:t>
             </a:r>
             <a:r>
               <a:rPr kumimoji="0" lang="ky-KG" sz="1200" b="0" i="0" u="none" strike="noStrike" kern="1200" cap="none" spc="0" normalizeH="0" baseline="0" noProof="0" dirty="0">
@@ -12091,7 +12091,7 @@
                 <a:ea typeface="Calibri" panose="020F0502020204030204"/>
                 <a:cs typeface="Calibri" panose="020F0502020204030204"/>
               </a:rPr>
-              <a:t>) 64 ÷ 0.4       		     </a:t>
+              <a:t>) 64 ÷ 0,4       		     </a:t>
             </a:r>
             <a:r>
               <a:rPr kumimoji="0" lang="ky-KG" sz="1200" b="0" i="0" u="none" strike="noStrike" kern="1200" cap="none" spc="0" normalizeH="0" baseline="0" noProof="0" dirty="0">
@@ -12125,7 +12125,7 @@
                 <a:ea typeface="Calibri" panose="020F0502020204030204"/>
                 <a:cs typeface="Calibri" panose="020F0502020204030204"/>
               </a:rPr>
-              <a:t>) 91 ÷ 0.7       </a:t>
+              <a:t>) 91 ÷ 0,7       </a:t>
             </a:r>
             <a:endParaRPr kumimoji="0" lang="en-US" sz="1200" b="0" i="0" u="none" strike="noStrike" kern="1200" cap="none" spc="0" normalizeH="0" baseline="0" noProof="0" dirty="0">
               <a:ln>
@@ -12225,7 +12225,7 @@
                 <a:ea typeface="Calibri" panose="020F0502020204030204"/>
                 <a:cs typeface="Calibri" panose="020F0502020204030204"/>
               </a:rPr>
-              <a:t>) 8.4 ÷ 2       			</a:t>
+              <a:t>) 8,4 ÷ 2       			</a:t>
             </a:r>
             <a:r>
               <a:rPr kumimoji="0" lang="ky-KG" sz="1200" b="0" i="0" u="none" strike="noStrike" kern="1200" cap="none" spc="0" normalizeH="0" baseline="0" noProof="0" dirty="0">
@@ -12259,7 +12259,7 @@
                 <a:ea typeface="Calibri" panose="020F0502020204030204"/>
                 <a:cs typeface="Calibri" panose="020F0502020204030204"/>
               </a:rPr>
-              <a:t>) 2.4 ÷ 3       		     </a:t>
+              <a:t>) 2,4 ÷ 3       		     </a:t>
             </a:r>
             <a:r>
               <a:rPr kumimoji="0" lang="ky-KG" sz="1200" b="0" i="0" u="none" strike="noStrike" kern="1200" cap="none" spc="0" normalizeH="0" baseline="0" noProof="0" dirty="0">
@@ -12293,7 +12293,7 @@
                 <a:ea typeface="Calibri" panose="020F0502020204030204"/>
                 <a:cs typeface="Calibri" panose="020F0502020204030204"/>
               </a:rPr>
-              <a:t>) 8.1 ÷ 3       </a:t>
+              <a:t>) 8,1 ÷ 3       </a:t>
             </a:r>
           </a:p>
           <a:p>
@@ -12346,7 +12346,7 @@
                 <a:ea typeface="Calibri" panose="020F0502020204030204"/>
                 <a:cs typeface="Calibri" panose="020F0502020204030204"/>
               </a:rPr>
-              <a:t>) 3.6 ÷ 6       			</a:t>
+              <a:t>) 3,6 ÷ 6       			</a:t>
             </a:r>
             <a:r>
               <a:rPr kumimoji="0" lang="ky-KG" sz="1200" b="0" i="0" u="none" strike="noStrike" kern="1200" cap="none" spc="0" normalizeH="0" baseline="0" noProof="0" dirty="0">
@@ -12380,7 +12380,7 @@
                 <a:ea typeface="Calibri" panose="020F0502020204030204"/>
                 <a:cs typeface="Calibri" panose="020F0502020204030204"/>
               </a:rPr>
-              <a:t>) 12.8 ÷ 4		    </a:t>
+              <a:t>) 12,8 ÷ 4		    </a:t>
             </a:r>
             <a:r>
               <a:rPr kumimoji="0" lang="ky-KG" sz="1200" b="0" i="0" u="none" strike="noStrike" kern="1200" cap="none" spc="0" normalizeH="0" baseline="0" noProof="0" dirty="0">
@@ -12414,7 +12414,7 @@
                 <a:ea typeface="Calibri" panose="020F0502020204030204"/>
                 <a:cs typeface="Calibri" panose="020F0502020204030204"/>
               </a:rPr>
-              <a:t>) 10.2 ÷ 6    </a:t>
+              <a:t>) 10,2 ÷ 6    </a:t>
             </a:r>
           </a:p>
           <a:p>
@@ -12467,7 +12467,7 @@
                 <a:ea typeface="Calibri" panose="020F0502020204030204"/>
                 <a:cs typeface="Calibri" panose="020F0502020204030204"/>
               </a:rPr>
-              <a:t>) 9.5 ÷ 5       			</a:t>
+              <a:t>) 9,5 ÷ 5       			</a:t>
             </a:r>
             <a:r>
               <a:rPr kumimoji="0" lang="ky-KG" sz="1200" b="0" i="0" u="none" strike="noStrike" kern="1200" cap="none" spc="0" normalizeH="0" baseline="0" noProof="0" dirty="0">
@@ -12501,7 +12501,7 @@
                 <a:ea typeface="Calibri" panose="020F0502020204030204"/>
                 <a:cs typeface="Calibri" panose="020F0502020204030204"/>
               </a:rPr>
-              <a:t>) 7.2 ÷ 4       		     </a:t>
+              <a:t>) 7,2 ÷ 4       		     </a:t>
             </a:r>
             <a:r>
               <a:rPr kumimoji="0" lang="ky-KG" sz="1200" b="0" i="0" u="none" strike="noStrike" kern="1200" cap="none" spc="0" normalizeH="0" baseline="0" noProof="0" dirty="0">
@@ -12535,7 +12535,7 @@
                 <a:ea typeface="Calibri" panose="020F0502020204030204"/>
                 <a:cs typeface="Calibri" panose="020F0502020204030204"/>
               </a:rPr>
-              <a:t>) 9.8 ÷ 7         </a:t>
+              <a:t>) 9,8 ÷ 7         </a:t>
             </a:r>
           </a:p>
           <a:p>
@@ -12621,7 +12621,7 @@
                 <a:ea typeface="Calibri" panose="020F0502020204030204"/>
                 <a:cs typeface="Calibri" panose="020F0502020204030204"/>
               </a:rPr>
-              <a:t>) 1.02 ÷ 0.6       			</a:t>
+              <a:t>) 1,02 ÷ 0,6       			</a:t>
             </a:r>
             <a:r>
               <a:rPr kumimoji="0" lang="ky-KG" sz="1200" b="0" i="0" u="none" strike="noStrike" kern="1200" cap="none" spc="0" normalizeH="0" baseline="0" noProof="0" dirty="0">
@@ -12655,7 +12655,7 @@
                 <a:ea typeface="Calibri" panose="020F0502020204030204"/>
                 <a:cs typeface="Calibri" panose="020F0502020204030204"/>
               </a:rPr>
-              <a:t>) 0.64 ÷ 0.04       </a:t>
+              <a:t>) 0,64 ÷ 0,04       </a:t>
             </a:r>
           </a:p>
           <a:p>
@@ -12708,7 +12708,7 @@
                 <a:ea typeface="Calibri" panose="020F0502020204030204"/>
                 <a:cs typeface="Calibri" panose="020F0502020204030204"/>
               </a:rPr>
-              <a:t>) 1.6 ÷ 0.05       			</a:t>
+              <a:t>) 1,6 ÷ 0,05       			</a:t>
             </a:r>
             <a:r>
               <a:rPr kumimoji="0" lang="ky-KG" sz="1200" b="0" i="0" u="none" strike="noStrike" kern="1200" cap="none" spc="0" normalizeH="0" baseline="0" noProof="0" dirty="0">
@@ -12742,7 +12742,7 @@
                 <a:ea typeface="Calibri" panose="020F0502020204030204"/>
                 <a:cs typeface="Calibri" panose="020F0502020204030204"/>
               </a:rPr>
-              <a:t>) 0.135 ÷ 0.5</a:t>
+              <a:t>) 0,135 ÷ 0,5</a:t>
             </a:r>
           </a:p>
           <a:p>
